--- a/7.pptx
+++ b/7.pptx
@@ -27823,8 +27823,8 @@
         </p:nvSpPr>
         <p:spPr bwMode="auto">
           <a:xfrm>
-            <a:off x="196672" y="2544317"/>
-            <a:ext cx="8070736" cy="2585323"/>
+            <a:off x="196672" y="2128820"/>
+            <a:ext cx="7990585" cy="3416320"/>
           </a:xfrm>
           <a:prstGeom prst="rect">
             <a:avLst/>
@@ -28101,19 +28101,13 @@
             </a:endParaRPr>
           </a:p>
           <a:p>
-            <a:pPr marL="0" marR="0" lvl="0" indent="0" algn="l" defTabSz="914400" rtl="0" eaLnBrk="0" fontAlgn="base" latinLnBrk="0" hangingPunct="0">
+            <a:pPr lvl="0" eaLnBrk="0" fontAlgn="base" hangingPunct="0">
               <a:lnSpc>
                 <a:spcPct val="100000"/>
               </a:lnSpc>
-              <a:spcBef>
-                <a:spcPct val="0"/>
-              </a:spcBef>
               <a:spcAft>
                 <a:spcPct val="0"/>
               </a:spcAft>
-              <a:buClrTx/>
-              <a:buSzTx/>
-              <a:tabLst/>
             </a:pPr>
             <a:r>
               <a:rPr kumimoji="0" lang="en-US" altLang="en-US" sz="1800" b="0" i="0" u="none" strike="noStrike" cap="none" normalizeH="0" baseline="0" dirty="0">
@@ -28128,6 +28122,44 @@
               </a:rPr>
               <a:t>Taylor, S. J., &amp; Letham, B. (2018). Forecasting at Scale (Prophet)</a:t>
             </a:r>
+            <a:br>
+              <a:rPr lang="en-US" altLang="en-US" sz="1800" dirty="0">
+                <a:latin typeface="Arial" panose="020B0604020202020204" pitchFamily="34" charset="0"/>
+              </a:rPr>
+            </a:br>
+            <a:br>
+              <a:rPr lang="en-US" altLang="en-US" sz="1800" dirty="0">
+                <a:latin typeface="Arial" panose="020B0604020202020204" pitchFamily="34" charset="0"/>
+              </a:rPr>
+            </a:br>
+            <a:r>
+              <a:rPr lang="en-US" altLang="en-US" sz="1800" dirty="0">
+                <a:latin typeface="Arial" panose="020B0604020202020204" pitchFamily="34" charset="0"/>
+              </a:rPr>
+              <a:t>my repo:</a:t>
+            </a:r>
+            <a:br>
+              <a:rPr lang="en-US" altLang="en-US" sz="1800" dirty="0">
+                <a:latin typeface="Arial" panose="020B0604020202020204" pitchFamily="34" charset="0"/>
+              </a:rPr>
+            </a:br>
+            <a:r>
+              <a:rPr lang="en-US" altLang="en-US" sz="1800" dirty="0">
+                <a:latin typeface="Arial" panose="020B0604020202020204" pitchFamily="34" charset="0"/>
+                <a:hlinkClick r:id="rId2"/>
+              </a:rPr>
+              <a:t>https://github.com/fatemeh231/bitcoin-outlier-impact.git</a:t>
+            </a:r>
+            <a:endParaRPr kumimoji="0" lang="en-US" altLang="en-US" sz="1800" b="0" i="0" u="none" strike="noStrike" cap="none" normalizeH="0" baseline="0" dirty="0">
+              <a:ln>
+                <a:noFill/>
+              </a:ln>
+              <a:solidFill>
+                <a:schemeClr val="tx1"/>
+              </a:solidFill>
+              <a:effectLst/>
+              <a:latin typeface="Arial" panose="020B0604020202020204" pitchFamily="34" charset="0"/>
+            </a:endParaRPr>
           </a:p>
         </p:txBody>
       </p:sp>
@@ -28183,7 +28215,7 @@
           <p:nvPr/>
         </p:nvPicPr>
         <p:blipFill>
-          <a:blip r:embed="rId2">
+          <a:blip r:embed="rId3">
             <a:extLst>
               <a:ext uri="{28A0092B-C50C-407E-A947-70E740481C1C}">
                 <a14:useLocalDpi xmlns:a14="http://schemas.microsoft.com/office/drawing/2010/main" val="0"/>
